--- a/it/slides/22-Architettura_dei_Calcolatori-Verm1_Parte_4-Lab.pptx
+++ b/it/slides/22-Architettura_dei_Calcolatori-Verm1_Parte_4-Lab.pptx
@@ -150,18 +150,18 @@
   <p:extLst>
     <p:ext uri="{521415D9-36F7-43E2-AB2F-B90AF26B5E84}">
       <p14:sectionLst xmlns:p14="http://schemas.microsoft.com/office/powerpoint/2010/main">
-        <p14:section name="Apertura" id="{7a58903e-9831-492c-a565-7d43b055b0bb}">
+        <p14:section name="Apertura" id="{535f02dc-80ae-d5e4-3237-ca224c86926a}">
           <p14:sldIdLst>
             <p14:sldId id="256"/>
             <p14:sldId id="257"/>
           </p14:sldIdLst>
         </p14:section>
-        <p14:section name="I listati" id="{1015caa9-b4a3-593f-1974-e642e58a2148}">
+        <p14:section name="I listati" id="{747b9458-bb2b-c1bb-c0b0-7e86ed226219}">
           <p14:sldIdLst>
             <p14:sldId id="258"/>
           </p14:sldIdLst>
         </p14:section>
-        <p14:section name="Passo 1: il punteggio in cifre" id="{a6aeed2d-2bc6-3f19-ed43-3ab154e565b0}">
+        <p14:section name="Passo 1: il punteggio in cifre" id="{14dfa0cb-76b3-b591-350b-5448f83b3e5f}">
           <p14:sldIdLst>
             <p14:sldId id="259"/>
             <p14:sldId id="260"/>
@@ -169,14 +169,14 @@
             <p14:sldId id="262"/>
           </p14:sldIdLst>
         </p14:section>
-        <p14:section name="Passo 2: i livelli" id="{4ee3c9ae-2b47-9700-4a9d-62eec98944cb}">
+        <p14:section name="Passo 2: i livelli" id="{089702ec-00b2-2571-d6d5-0e3f0f8b7776}">
           <p14:sldIdLst>
             <p14:sldId id="263"/>
             <p14:sldId id="264"/>
             <p14:sldId id="265"/>
           </p14:sldIdLst>
         </p14:section>
-        <p14:section name="Passo 3: step dice che cosa ha cambiato" id="{aeaae7d8-e9da-b0ff-2f32-34fa3d337685}">
+        <p14:section name="Passo 3: step dice che cosa ha cambiato" id="{9dc44f71-225b-a314-ef05-64a606a0a862}">
           <p14:sldIdLst>
             <p14:sldId id="266"/>
             <p14:sldId id="267"/>
@@ -188,7 +188,7 @@
             <p14:sldId id="273"/>
           </p14:sldIdLst>
         </p14:section>
-        <p14:section name="Passo 4: disegnare solo ciò che è cambiato" id="{6509c5e5-b7af-15ff-e849-94558226fe17}">
+        <p14:section name="Passo 4: disegnare solo ciò che è cambiato" id="{ae13417d-0dd3-09ab-4de9-ce97a3b6c1f8}">
           <p14:sldIdLst>
             <p14:sldId id="274"/>
             <p14:sldId id="275"/>
@@ -203,7 +203,7 @@
             <p14:sldId id="284"/>
           </p14:sldIdLst>
         </p14:section>
-        <p14:section name="Passo 5: misurare" id="{61c9f165-466a-a835-ba90-45683b9ea219}">
+        <p14:section name="Passo 5: misurare" id="{97ce6f01-90e2-60ca-83a4-2b544c78777a}">
           <p14:sldIdLst>
             <p14:sldId id="285"/>
             <p14:sldId id="286"/>
@@ -216,7 +216,7 @@
             <p14:sldId id="293"/>
           </p14:sldIdLst>
         </p14:section>
-        <p14:section name="Eseguire e provare" id="{3f3e3b23-919d-2bb8-e262-7a089b5f533f}">
+        <p14:section name="Eseguire e provare" id="{bbd016b5-8618-411d-90d5-3b8542021980}">
           <p14:sldIdLst>
             <p14:sldId id="294"/>
             <p14:sldId id="295"/>
@@ -225,7 +225,7 @@
             <p14:sldId id="298"/>
           </p14:sldIdLst>
         </p14:section>
-        <p14:section name="Esercizi" id="{c8b063f0-b475-b366-7ecf-f013c10c0ccb}">
+        <p14:section name="Esercizi" id="{f9ebe38a-9c71-b881-7f9d-115ad16d75c4}">
           <p14:sldIdLst>
             <p14:sldId id="299"/>
           </p14:sldIdLst>

--- a/it/slides/22-Architettura_dei_Calcolatori-Verm1_Parte_4-Lab.pptx
+++ b/it/slides/22-Architettura_dei_Calcolatori-Verm1_Parte_4-Lab.pptx
@@ -150,18 +150,18 @@
   <p:extLst>
     <p:ext uri="{521415D9-36F7-43E2-AB2F-B90AF26B5E84}">
       <p14:sectionLst xmlns:p14="http://schemas.microsoft.com/office/powerpoint/2010/main">
-        <p14:section name="Apertura" id="{535f02dc-80ae-d5e4-3237-ca224c86926a}">
+        <p14:section name="Apertura" id="{55909d97-b5b6-1e9c-749f-5631d09f8a21}">
           <p14:sldIdLst>
             <p14:sldId id="256"/>
             <p14:sldId id="257"/>
           </p14:sldIdLst>
         </p14:section>
-        <p14:section name="I listati" id="{747b9458-bb2b-c1bb-c0b0-7e86ed226219}">
+        <p14:section name="I listati" id="{49d911ed-2852-0b76-5fcf-61d4dd314627}">
           <p14:sldIdLst>
             <p14:sldId id="258"/>
           </p14:sldIdLst>
         </p14:section>
-        <p14:section name="Passo 1: il punteggio in cifre" id="{14dfa0cb-76b3-b591-350b-5448f83b3e5f}">
+        <p14:section name="Passo 1: il punteggio in cifre" id="{0cf417d4-ca62-c43c-f1b2-571144d6407d}">
           <p14:sldIdLst>
             <p14:sldId id="259"/>
             <p14:sldId id="260"/>
@@ -169,14 +169,14 @@
             <p14:sldId id="262"/>
           </p14:sldIdLst>
         </p14:section>
-        <p14:section name="Passo 2: i livelli" id="{089702ec-00b2-2571-d6d5-0e3f0f8b7776}">
+        <p14:section name="Passo 2: i livelli" id="{b4b6adcd-d909-7e45-efaf-9c3c5ada3f28}">
           <p14:sldIdLst>
             <p14:sldId id="263"/>
             <p14:sldId id="264"/>
             <p14:sldId id="265"/>
           </p14:sldIdLst>
         </p14:section>
-        <p14:section name="Passo 3: step dice che cosa ha cambiato" id="{9dc44f71-225b-a314-ef05-64a606a0a862}">
+        <p14:section name="Passo 3: step dice che cosa ha cambiato" id="{8f09526a-5976-cddd-3eff-7af0d7fa0c27}">
           <p14:sldIdLst>
             <p14:sldId id="266"/>
             <p14:sldId id="267"/>
@@ -188,7 +188,7 @@
             <p14:sldId id="273"/>
           </p14:sldIdLst>
         </p14:section>
-        <p14:section name="Passo 4: disegnare solo ciò che è cambiato" id="{ae13417d-0dd3-09ab-4de9-ce97a3b6c1f8}">
+        <p14:section name="Passo 4: disegnare solo ciò che è cambiato" id="{0a36014a-9cec-72ee-1672-723b6fbb38eb}">
           <p14:sldIdLst>
             <p14:sldId id="274"/>
             <p14:sldId id="275"/>
@@ -203,7 +203,7 @@
             <p14:sldId id="284"/>
           </p14:sldIdLst>
         </p14:section>
-        <p14:section name="Passo 5: misurare" id="{97ce6f01-90e2-60ca-83a4-2b544c78777a}">
+        <p14:section name="Passo 5: misurare" id="{c3311afa-87ce-4926-96d2-92a4a07efb7f}">
           <p14:sldIdLst>
             <p14:sldId id="285"/>
             <p14:sldId id="286"/>
@@ -216,7 +216,7 @@
             <p14:sldId id="293"/>
           </p14:sldIdLst>
         </p14:section>
-        <p14:section name="Eseguire e provare" id="{bbd016b5-8618-411d-90d5-3b8542021980}">
+        <p14:section name="Eseguire e provare" id="{54e95baf-1a2e-e260-5cd9-2ee992f5651e}">
           <p14:sldIdLst>
             <p14:sldId id="294"/>
             <p14:sldId id="295"/>
@@ -225,7 +225,7 @@
             <p14:sldId id="298"/>
           </p14:sldIdLst>
         </p14:section>
-        <p14:section name="Esercizi" id="{f9ebe38a-9c71-b881-7f9d-115ad16d75c4}">
+        <p14:section name="Esercizi" id="{e5007fbd-3958-94d7-a2af-cbe756cfc2ca}">
           <p14:sldIdLst>
             <p14:sldId id="299"/>
           </p14:sldIdLst>
@@ -636,7 +636,8 @@
               <a:rPr lang="en-US" dirty="0"/>
               <a:t>Questa è la presentazione del codice della Lezione 22. Mentre la presentazione della lezione sviluppa i concetti, questa raccoglie tutto ciò che si scrive e si esegue: ogni listato con il suo commento, il programma completo della lezione, il risultato che deve produrre, e la procedura per provarlo su ciascuno dei tre host. Le due presentazioni vanno lette insieme: i concetti spiegano il codice, e il codice dà ai concetti una conseguenza osservabile.
 Stato di apprendimento: DA COMPRENDERE OGGI, alla fine di questa lezione lo spiegate, lo seguite passo passo e lo applicate da soli; DA UTILIZZARE OGGI, oggi seguite e usate la ricetta; come funziona dentro si spiega più avanti, o non fa parte del corso; DA COMPRENDERE PIÙ AVANTI, riconoscete il nome e lo scopo; lo spiega una lezione successiva. Una slide senza etichetta è contesto: una storia, un esempio, una domanda, un esercizio.
-Stato di apprendimento di questa lezione. DA COMPRENDERE OGGI: quoziente e resto; caratteri e stringhe; la virgola fissa; la convenzione di chiamata; gli array in memoria; macchine a stati finiti; il frame buffer; il ciclo del processore. DA UTILIZZARE OGGI: gli strumenti di PRG32, il debugger di PRG32-QT (si usa, non si studia, in questo corso). DA COMPRENDERE PIÙ AVANTI: niente. Una slide senza etichetta è contesto: una storia, un esempio, una domanda, un esercizio.</a:t>
+Stato di apprendimento di questa lezione. DA COMPRENDERE OGGI: quoziente e resto; caratteri e stringhe; la virgola fissa; la convenzione di chiamata; gli array in memoria; macchine a stati finiti; il frame buffer; il ciclo del processore. DA UTILIZZARE OGGI: gli strumenti di PRG32, il debugger di PRG32-QT (si usa, non si studia, in questo corso). DA COMPRENDERE PIÙ AVANTI: niente. Una slide senza etichetta è contesto: una storia, un esempio, una domanda, un esercizio.
+Percorso. I risultati di oggi: (1) trasformare un numero in cifre decimali con divu e remu; (2) disegnare solo ciò che è cambiato, con un flag dirty; (3) completare il gioco: livelli, suono, velocità. Si appoggia su: caratteri e stringhe (Lezione 04); la virgola fissa (Lezione 06); la convenzione di chiamata (Lezione 18); gli array in memoria (Lezione 04); macchine a stati finiti (Lezione 13). Prossimo passo: Lezione 23, Verm1 sul Cartridge Store.</a:t>
             </a:r>
             <a:endParaRPr lang="en-US" dirty="0"/>
           </a:p>
